--- a/public/fun/pack/pptx/birthdaypro/돌잔치프리미엄_05_첫번째이야기중심_라일락실버.pptx
+++ b/public/fun/pack/pptx/birthdaypro/돌잔치프리미엄_05_첫번째이야기중심_라일락실버.pptx
@@ -112,12 +112,12 @@
   <p:extLst>
     <p:ext uri="{521415D9-36F7-43E2-AB2F-B90AF26B5E84}">
       <p14:sectionLst xmlns:p14="http://schemas.microsoft.com/office/powerpoint/2010/main">
-        <p14:section name="시작" id="{113E24DE-78CD-433C-972B-2284EC64FE45}">
+        <p14:section name="시작" id="{872BE963-B752-4665-87D1-A00DAA5106AA}">
           <p14:sldIdLst>
             <p14:sldId id="256"/>
           </p14:sldIdLst>
         </p14:section>
-        <p14:section name="본문" id="{D03A60AE-522B-4ED3-BF20-04F43B2ED19E}">
+        <p14:section name="본문" id="{2EF4B61D-FA7C-40E8-A14D-A6805CA19EDE}">
           <p14:sldIdLst>
             <p14:sldId id="257"/>
             <p14:sldId id="258"/>
@@ -125,7 +125,7 @@
             <p14:sldId id="260"/>
           </p14:sldIdLst>
         </p14:section>
-        <p14:section name="마무리" id="{591FD407-5630-4BCA-AB2B-2ADF3E8A8E05}">
+        <p14:section name="마무리" id="{8CDB5395-A1AF-43CA-9CEA-7E3FFEA884E4}">
           <p14:sldIdLst>
             <p14:sldId id="261"/>
           </p14:sldIdLst>
@@ -1514,7 +1514,7 @@
             </a:lvl1pPr>
           </a:lstStyle>
           <a:p>
-            <a:fld id="{A92B8EB3-E491-4559-B71A-D45C86C59C57}" type="slidenum">
+            <a:fld id="{F4E76909-1E51-44AE-B02C-B158D9679F69}" type="slidenum">
               <a:rPr lang="en-US"/>
               <a:t>‹#›</a:t>
             </a:fld>
@@ -2191,7 +2191,7 @@
             </a:lvl1pPr>
           </a:lstStyle>
           <a:p>
-            <a:fld id="{EC2C42C9-DCC3-4BC0-BC3E-D3529D352F66}" type="slidenum">
+            <a:fld id="{C68D5063-ABBB-4DEB-A776-1FEAE0709E86}" type="slidenum">
               <a:rPr lang="en-US"/>
               <a:t>‹#›</a:t>
             </a:fld>
@@ -2831,7 +2831,7 @@
             </a:lvl1pPr>
           </a:lstStyle>
           <a:p>
-            <a:fld id="{446FC3DA-7EC3-4729-B760-6C37AA4E47FE}" type="slidenum">
+            <a:fld id="{3A0B92E4-F862-495C-A202-A4B7D79078B2}" type="slidenum">
               <a:rPr lang="en-US"/>
               <a:t>‹#›</a:t>
             </a:fld>
@@ -3692,7 +3692,7 @@
           <a:p>
             <a:r>
               <a:rPr lang="ko-KR"/>
-              <a:t>아기 이름 · 0000. 00. 00</a:t>
+              <a:t>아기 이름 · 날짜 입력</a:t>
             </a:r>
           </a:p>
           <a:p>
@@ -3853,7 +3853,7 @@
           <a:bodyPr/>
           <a:lstStyle/>
           <a:p>
-            <a:fld id="{669B842D-B030-4EC1-AB92-E52BBF30FA92}" type="slidenum">
+            <a:fld id="{425D8A22-2CEA-4C90-884B-FFF325A19F53}" type="slidenum">
               <a:rPr lang="en-US"/>
               <a:t>‹#›</a:t>
             </a:fld>
@@ -4453,7 +4453,7 @@
           <a:bodyPr/>
           <a:lstStyle/>
           <a:p>
-            <a:fld id="{2DC93D92-70B5-49DE-9AD4-4F495E2ACD7C}" type="slidenum">
+            <a:fld id="{E79F7BBC-6988-4CD9-98AB-914009D0F53D}" type="slidenum">
               <a:rPr lang="en-US"/>
               <a:t>‹#›</a:t>
             </a:fld>
@@ -5428,7 +5428,7 @@
           <a:bodyPr/>
           <a:lstStyle/>
           <a:p>
-            <a:fld id="{6AA7749B-B75C-4E59-8E84-D36C55779FD0}" type="slidenum">
+            <a:fld id="{6C853F0C-517C-4934-B717-2E94BF153195}" type="slidenum">
               <a:rPr lang="en-US"/>
               <a:t>‹#›</a:t>
             </a:fld>
@@ -7150,7 +7150,7 @@
           <a:bodyPr/>
           <a:lstStyle/>
           <a:p>
-            <a:fld id="{B9A5D425-104E-4B4B-B64C-0A614FBBCB21}" type="slidenum">
+            <a:fld id="{504AD23F-1A2B-43D8-94EE-E4472700664C}" type="slidenum">
               <a:rPr lang="en-US"/>
               <a:t>‹#›</a:t>
             </a:fld>
